--- a/SIP_Presentation (3).pptx
+++ b/SIP_Presentation (3).pptx
@@ -5,19 +5,20 @@
     <p:sldMasterId id="2147483648" r:id="rId1"/>
   </p:sldMasterIdLst>
   <p:notesMasterIdLst>
-    <p:notesMasterId r:id="rId12"/>
+    <p:notesMasterId r:id="rId13"/>
   </p:notesMasterIdLst>
   <p:sldIdLst>
     <p:sldId id="256" r:id="rId2"/>
-    <p:sldId id="257" r:id="rId3"/>
-    <p:sldId id="258" r:id="rId4"/>
-    <p:sldId id="259" r:id="rId5"/>
-    <p:sldId id="260" r:id="rId6"/>
-    <p:sldId id="261" r:id="rId7"/>
-    <p:sldId id="262" r:id="rId8"/>
-    <p:sldId id="264" r:id="rId9"/>
-    <p:sldId id="265" r:id="rId10"/>
-    <p:sldId id="266" r:id="rId11"/>
+    <p:sldId id="267" r:id="rId3"/>
+    <p:sldId id="257" r:id="rId4"/>
+    <p:sldId id="258" r:id="rId5"/>
+    <p:sldId id="259" r:id="rId6"/>
+    <p:sldId id="260" r:id="rId7"/>
+    <p:sldId id="261" r:id="rId8"/>
+    <p:sldId id="262" r:id="rId9"/>
+    <p:sldId id="264" r:id="rId10"/>
+    <p:sldId id="265" r:id="rId11"/>
+    <p:sldId id="266" r:id="rId12"/>
   </p:sldIdLst>
   <p:sldSz cx="9144000" cy="5143500" type="screen16x9"/>
   <p:notesSz cx="5143500" cy="9144000"/>
@@ -414,7 +415,7 @@
 </p:notes>
 </file>
 
-<file path=ppt/notesSlides/notesSlide2.xml><?xml version="1.0" encoding="utf-8"?>
+<file path=ppt/notesSlides/notesSlide11.xml><?xml version="1.0" encoding="utf-8"?>
 <p:notes xmlns:a="http://schemas.openxmlformats.org/drawingml/2006/main" xmlns:r="http://schemas.openxmlformats.org/officeDocument/2006/relationships" xmlns:p="http://schemas.openxmlformats.org/presentationml/2006/main">
   <p:cSld>
     <p:spTree>
@@ -479,7 +480,7 @@
           <a:p>
             <a:fld id="{F7021451-1387-4CA6-816F-3879F97B5CBC}" type="slidenum">
               <a:rPr lang="en-US"/>
-              <a:t>2</a:t>
+              <a:t>11</a:t>
             </a:fld>
             <a:endParaRPr lang="en-US"/>
           </a:p>
@@ -489,6 +490,114 @@
     <p:extLst>
       <p:ext uri="{BB962C8B-B14F-4D97-AF65-F5344CB8AC3E}">
         <p14:creationId xmlns:p14="http://schemas.microsoft.com/office/powerpoint/2010/main" val="1024086991"/>
+      </p:ext>
+    </p:extLst>
+  </p:cSld>
+  <p:clrMapOvr>
+    <a:masterClrMapping/>
+  </p:clrMapOvr>
+</p:notes>
+</file>
+
+<file path=ppt/notesSlides/notesSlide2.xml><?xml version="1.0" encoding="utf-8"?>
+<p:notes xmlns:a="http://schemas.openxmlformats.org/drawingml/2006/main" xmlns:r="http://schemas.openxmlformats.org/officeDocument/2006/relationships" xmlns:p="http://schemas.openxmlformats.org/presentationml/2006/main">
+  <p:cSld>
+    <p:spTree>
+      <p:nvGrpSpPr>
+        <p:cNvPr id="1" name="">
+          <a:extLst>
+            <a:ext uri="{FF2B5EF4-FFF2-40B4-BE49-F238E27FC236}">
+              <a16:creationId xmlns:a16="http://schemas.microsoft.com/office/drawing/2014/main" id="{0AEA84F7-39B6-911D-9108-19648E1CAA0A}"/>
+            </a:ext>
+          </a:extLst>
+        </p:cNvPr>
+        <p:cNvGrpSpPr/>
+        <p:nvPr/>
+      </p:nvGrpSpPr>
+      <p:grpSpPr>
+        <a:xfrm>
+          <a:off x="0" y="0"/>
+          <a:ext cx="0" cy="0"/>
+          <a:chOff x="0" y="0"/>
+          <a:chExt cx="0" cy="0"/>
+        </a:xfrm>
+      </p:grpSpPr>
+      <p:sp>
+        <p:nvSpPr>
+          <p:cNvPr id="2" name="Slide Image Placeholder 1">
+            <a:extLst>
+              <a:ext uri="{FF2B5EF4-FFF2-40B4-BE49-F238E27FC236}">
+                <a16:creationId xmlns:a16="http://schemas.microsoft.com/office/drawing/2014/main" id="{BDD492D3-90B3-1C45-4CEA-691AC6345BD3}"/>
+              </a:ext>
+            </a:extLst>
+          </p:cNvPr>
+          <p:cNvSpPr>
+            <a:spLocks noGrp="1" noRot="1" noChangeAspect="1"/>
+          </p:cNvSpPr>
+          <p:nvPr>
+            <p:ph type="sldImg"/>
+          </p:nvPr>
+        </p:nvSpPr>
+        <p:spPr/>
+      </p:sp>
+      <p:sp>
+        <p:nvSpPr>
+          <p:cNvPr id="3" name="Notes Placeholder 2">
+            <a:extLst>
+              <a:ext uri="{FF2B5EF4-FFF2-40B4-BE49-F238E27FC236}">
+                <a16:creationId xmlns:a16="http://schemas.microsoft.com/office/drawing/2014/main" id="{C51DE411-E250-7FE7-CE87-095DD83868AD}"/>
+              </a:ext>
+            </a:extLst>
+          </p:cNvPr>
+          <p:cNvSpPr>
+            <a:spLocks noGrp="1"/>
+          </p:cNvSpPr>
+          <p:nvPr>
+            <p:ph type="body" idx="1"/>
+          </p:nvPr>
+        </p:nvSpPr>
+        <p:spPr/>
+        <p:txBody>
+          <a:bodyPr/>
+          <a:lstStyle/>
+          <a:p>
+            <a:endParaRPr lang="en-US" dirty="0"/>
+          </a:p>
+        </p:txBody>
+      </p:sp>
+      <p:sp>
+        <p:nvSpPr>
+          <p:cNvPr id="4" name="Slide Number Placeholder 3">
+            <a:extLst>
+              <a:ext uri="{FF2B5EF4-FFF2-40B4-BE49-F238E27FC236}">
+                <a16:creationId xmlns:a16="http://schemas.microsoft.com/office/drawing/2014/main" id="{9D3197B4-360F-ED8E-CCA3-A1FB73CBB548}"/>
+              </a:ext>
+            </a:extLst>
+          </p:cNvPr>
+          <p:cNvSpPr>
+            <a:spLocks noGrp="1"/>
+          </p:cNvSpPr>
+          <p:nvPr>
+            <p:ph type="sldNum" sz="quarter" idx="10"/>
+          </p:nvPr>
+        </p:nvSpPr>
+        <p:spPr/>
+        <p:txBody>
+          <a:bodyPr/>
+          <a:lstStyle/>
+          <a:p>
+            <a:fld id="{F7021451-1387-4CA6-816F-3879F97B5CBC}" type="slidenum">
+              <a:rPr lang="en-US"/>
+              <a:t>2</a:t>
+            </a:fld>
+            <a:endParaRPr lang="en-US"/>
+          </a:p>
+        </p:txBody>
+      </p:sp>
+    </p:spTree>
+    <p:extLst>
+      <p:ext uri="{BB962C8B-B14F-4D97-AF65-F5344CB8AC3E}">
+        <p14:creationId xmlns:p14="http://schemas.microsoft.com/office/powerpoint/2010/main" val="480077739"/>
       </p:ext>
     </p:extLst>
   </p:cSld>
@@ -1441,8 +1550,8 @@
         </p:blipFill>
         <p:spPr>
           <a:xfrm>
-            <a:off x="1828800" y="-731520"/>
-            <a:ext cx="8229600" cy="8229600"/>
+            <a:off x="0" y="-731521"/>
+            <a:ext cx="9103953" cy="9103953"/>
           </a:xfrm>
           <a:prstGeom prst="rect">
             <a:avLst/>
@@ -1467,7 +1576,7 @@
         </p:blipFill>
         <p:spPr>
           <a:xfrm>
-            <a:off x="0" y="0"/>
+            <a:off x="40047" y="53395"/>
             <a:ext cx="9144000" cy="5143500"/>
           </a:xfrm>
           <a:prstGeom prst="rect">
@@ -1483,7 +1592,7 @@
         </p:nvSpPr>
         <p:spPr>
           <a:xfrm>
-            <a:off x="502920" y="1051560"/>
+            <a:off x="3373120" y="2398014"/>
             <a:ext cx="2194560" cy="347472"/>
           </a:xfrm>
           <a:prstGeom prst="roundRect">
@@ -1513,7 +1622,7 @@
         </p:blipFill>
         <p:spPr>
           <a:xfrm>
-            <a:off x="621792" y="1133856"/>
+            <a:off x="3491992" y="2480310"/>
             <a:ext cx="182880" cy="182880"/>
           </a:xfrm>
           <a:prstGeom prst="rect">
@@ -1529,7 +1638,7 @@
         </p:nvSpPr>
         <p:spPr>
           <a:xfrm>
-            <a:off x="868680" y="1078992"/>
+            <a:off x="3738880" y="2425446"/>
             <a:ext cx="1691640" cy="292608"/>
           </a:xfrm>
           <a:prstGeom prst="rect">
@@ -1557,176 +1666,6 @@
               <a:t>جشنواره خوارزمی</a:t>
             </a:r>
             <a:endParaRPr lang="en-US" sz="1200" dirty="0">
-              <a:latin typeface="Vazirmatn" pitchFamily="2" charset="-78"/>
-              <a:cs typeface="Vazirmatn" pitchFamily="2" charset="-78"/>
-            </a:endParaRPr>
-          </a:p>
-        </p:txBody>
-      </p:sp>
-      <p:sp>
-        <p:nvSpPr>
-          <p:cNvPr id="8" name="Text 3"/>
-          <p:cNvSpPr/>
-          <p:nvPr/>
-        </p:nvSpPr>
-        <p:spPr>
-          <a:xfrm>
-            <a:off x="2331720" y="1078992"/>
-            <a:ext cx="5943600" cy="1371600"/>
-          </a:xfrm>
-          <a:prstGeom prst="rect">
-            <a:avLst/>
-          </a:prstGeom>
-          <a:noFill/>
-          <a:ln/>
-        </p:spPr>
-        <p:txBody>
-          <a:bodyPr wrap="square" lIns="0" tIns="0" rIns="0" bIns="0" rtlCol="0" anchor="t"/>
-          <a:lstStyle/>
-          <a:p>
-            <a:pPr marL="0" indent="0" algn="r">
-              <a:buNone/>
-            </a:pPr>
-            <a:r>
-              <a:rPr lang="en-US" sz="3600" b="1" dirty="0">
-                <a:solidFill>
-                  <a:srgbClr val="F8FAFC"/>
-                </a:solidFill>
-                <a:latin typeface="Vazirmatn" pitchFamily="2" charset="-78"/>
-                <a:ea typeface="Arial" pitchFamily="34" charset="-122"/>
-                <a:cs typeface="Vazirmatn" pitchFamily="2" charset="-78"/>
-              </a:rPr>
-              <a:t>سامانه هوشمند</a:t>
-            </a:r>
-            <a:endParaRPr lang="en-US" sz="3600" dirty="0">
-              <a:latin typeface="Vazirmatn" pitchFamily="2" charset="-78"/>
-              <a:cs typeface="Vazirmatn" pitchFamily="2" charset="-78"/>
-            </a:endParaRPr>
-          </a:p>
-          <a:p>
-            <a:pPr marL="0" indent="0" algn="r">
-              <a:buNone/>
-            </a:pPr>
-            <a:r>
-              <a:rPr lang="en-US" sz="3600" b="1" dirty="0">
-                <a:solidFill>
-                  <a:srgbClr val="F8FAFC"/>
-                </a:solidFill>
-                <a:latin typeface="Vazirmatn" pitchFamily="2" charset="-78"/>
-                <a:ea typeface="Arial" pitchFamily="34" charset="-122"/>
-                <a:cs typeface="Vazirmatn" pitchFamily="2" charset="-78"/>
-              </a:rPr>
-              <a:t>مدیریت مدارس</a:t>
-            </a:r>
-            <a:endParaRPr lang="en-US" sz="3600" dirty="0">
-              <a:latin typeface="Vazirmatn" pitchFamily="2" charset="-78"/>
-              <a:cs typeface="Vazirmatn" pitchFamily="2" charset="-78"/>
-            </a:endParaRPr>
-          </a:p>
-        </p:txBody>
-      </p:sp>
-      <p:sp>
-        <p:nvSpPr>
-          <p:cNvPr id="9" name="Text 4"/>
-          <p:cNvSpPr/>
-          <p:nvPr/>
-        </p:nvSpPr>
-        <p:spPr>
-          <a:xfrm>
-            <a:off x="2331720" y="2542032"/>
-            <a:ext cx="5943600" cy="320040"/>
-          </a:xfrm>
-          <a:prstGeom prst="rect">
-            <a:avLst/>
-          </a:prstGeom>
-          <a:noFill/>
-          <a:ln/>
-        </p:spPr>
-        <p:txBody>
-          <a:bodyPr wrap="square" lIns="0" tIns="0" rIns="0" bIns="0" rtlCol="0" anchor="ctr"/>
-          <a:lstStyle/>
-          <a:p>
-            <a:pPr marL="0" indent="0" algn="r">
-              <a:buNone/>
-            </a:pPr>
-            <a:r>
-              <a:rPr lang="en-US" sz="1600" dirty="0">
-                <a:solidFill>
-                  <a:srgbClr val="4C7CF0"/>
-                </a:solidFill>
-                <a:latin typeface="Vazirmatn" pitchFamily="2" charset="-78"/>
-                <a:ea typeface="Arial" pitchFamily="34" charset="-122"/>
-                <a:cs typeface="Vazirmatn" pitchFamily="2" charset="-78"/>
-              </a:rPr>
-              <a:t>School Intelligence Platform  ·  SIP</a:t>
-            </a:r>
-            <a:endParaRPr lang="en-US" sz="1600" dirty="0">
-              <a:latin typeface="Vazirmatn" pitchFamily="2" charset="-78"/>
-              <a:cs typeface="Vazirmatn" pitchFamily="2" charset="-78"/>
-            </a:endParaRPr>
-          </a:p>
-        </p:txBody>
-      </p:sp>
-      <p:pic>
-        <p:nvPicPr>
-          <p:cNvPr id="10" name="Image 3" descr="preencoded.png"/>
-          <p:cNvPicPr>
-            <a:picLocks noChangeAspect="1"/>
-          </p:cNvPicPr>
-          <p:nvPr/>
-        </p:nvPicPr>
-        <p:blipFill>
-          <a:blip r:embed="rId6"/>
-          <a:stretch>
-            <a:fillRect/>
-          </a:stretch>
-        </p:blipFill>
-        <p:spPr>
-          <a:xfrm>
-            <a:off x="6035040" y="2999232"/>
-            <a:ext cx="2194560" cy="54864"/>
-          </a:xfrm>
-          <a:prstGeom prst="rect">
-            <a:avLst/>
-          </a:prstGeom>
-        </p:spPr>
-      </p:pic>
-      <p:sp>
-        <p:nvSpPr>
-          <p:cNvPr id="11" name="Text 5"/>
-          <p:cNvSpPr/>
-          <p:nvPr/>
-        </p:nvSpPr>
-        <p:spPr>
-          <a:xfrm>
-            <a:off x="2331720" y="3273552"/>
-            <a:ext cx="5943600" cy="365760"/>
-          </a:xfrm>
-          <a:prstGeom prst="rect">
-            <a:avLst/>
-          </a:prstGeom>
-          <a:noFill/>
-          <a:ln/>
-        </p:spPr>
-        <p:txBody>
-          <a:bodyPr wrap="square" lIns="0" tIns="0" rIns="0" bIns="0" rtlCol="0" anchor="ctr"/>
-          <a:lstStyle/>
-          <a:p>
-            <a:pPr marL="0" indent="0" algn="r">
-              <a:buNone/>
-            </a:pPr>
-            <a:r>
-              <a:rPr lang="en-US" sz="1400" dirty="0">
-                <a:solidFill>
-                  <a:srgbClr val="94A3B8"/>
-                </a:solidFill>
-                <a:latin typeface="Vazirmatn" pitchFamily="2" charset="-78"/>
-                <a:ea typeface="Arial" pitchFamily="34" charset="-122"/>
-                <a:cs typeface="Vazirmatn" pitchFamily="2" charset="-78"/>
-              </a:rPr>
-              <a:t>تصمیم‌یار آموزشی مبتنی بر الگوریتم — نه فقط حضور و نمره</a:t>
-            </a:r>
-            <a:endParaRPr lang="en-US" sz="1400" dirty="0">
               <a:latin typeface="Vazirmatn" pitchFamily="2" charset="-78"/>
               <a:cs typeface="Vazirmatn" pitchFamily="2" charset="-78"/>
             </a:endParaRPr>
@@ -1738,13 +1677,13 @@
   <p:clrMapOvr>
     <a:masterClrMapping/>
   </p:clrMapOvr>
-  <mc:AlternateContent xmlns:mc="http://schemas.openxmlformats.org/markup-compatibility/2006">
-    <mc:Choice xmlns:p159="http://schemas.microsoft.com/office/powerpoint/2015/09/main" Requires="p159">
+  <mc:AlternateContent xmlns:mc="http://schemas.openxmlformats.org/markup-compatibility/2006" xmlns:p159="http://schemas.microsoft.com/office/powerpoint/2015/09/main">
+    <mc:Choice Requires="p159">
       <p:transition xmlns:p14="http://schemas.microsoft.com/office/powerpoint/2010/main" spd="slow" p14:dur="2000">
         <p159:morph option="byChar"/>
       </p:transition>
     </mc:Choice>
-    <mc:Fallback>
+    <mc:Fallback xmlns="">
       <p:transition spd="slow">
         <p:fade/>
       </p:transition>
@@ -1754,6 +1693,273 @@
 </file>
 
 <file path=ppt/slides/slide10.xml><?xml version="1.0" encoding="utf-8"?>
+<p:sld xmlns:a="http://schemas.openxmlformats.org/drawingml/2006/main" xmlns:r="http://schemas.openxmlformats.org/officeDocument/2006/relationships" xmlns:p="http://schemas.openxmlformats.org/presentationml/2006/main">
+  <p:cSld name="Slide 10">
+    <p:bg>
+      <p:bgPr>
+        <a:solidFill>
+          <a:srgbClr val="070B14"/>
+        </a:solidFill>
+        <a:effectLst/>
+      </p:bgPr>
+    </p:bg>
+    <p:spTree>
+      <p:nvGrpSpPr>
+        <p:cNvPr id="1" name=""/>
+        <p:cNvGrpSpPr/>
+        <p:nvPr/>
+      </p:nvGrpSpPr>
+      <p:grpSpPr>
+        <a:xfrm>
+          <a:off x="0" y="0"/>
+          <a:ext cx="0" cy="0"/>
+          <a:chOff x="0" y="0"/>
+          <a:chExt cx="0" cy="0"/>
+        </a:xfrm>
+      </p:grpSpPr>
+      <p:pic>
+        <p:nvPicPr>
+          <p:cNvPr id="2" name="Image 0" descr="preencoded.png"/>
+          <p:cNvPicPr>
+            <a:picLocks noChangeAspect="1"/>
+          </p:cNvPicPr>
+          <p:nvPr/>
+        </p:nvPicPr>
+        <p:blipFill>
+          <a:blip r:embed="rId3">
+            <a:alphaModFix amt="70000"/>
+          </a:blip>
+          <a:stretch>
+            <a:fillRect/>
+          </a:stretch>
+        </p:blipFill>
+        <p:spPr>
+          <a:xfrm>
+            <a:off x="-647700" y="1463040"/>
+            <a:ext cx="4572000" cy="4572000"/>
+          </a:xfrm>
+          <a:prstGeom prst="rect">
+            <a:avLst/>
+          </a:prstGeom>
+        </p:spPr>
+      </p:pic>
+      <p:pic>
+        <p:nvPicPr>
+          <p:cNvPr id="3" name="Image 1" descr="preencoded.png"/>
+          <p:cNvPicPr>
+            <a:picLocks noChangeAspect="1"/>
+          </p:cNvPicPr>
+          <p:nvPr/>
+        </p:nvPicPr>
+        <p:blipFill>
+          <a:blip r:embed="rId4">
+            <a:alphaModFix amt="25000"/>
+          </a:blip>
+          <a:stretch>
+            <a:fillRect/>
+          </a:stretch>
+        </p:blipFill>
+        <p:spPr>
+          <a:xfrm>
+            <a:off x="0" y="0"/>
+            <a:ext cx="9144000" cy="5143500"/>
+          </a:xfrm>
+          <a:prstGeom prst="rect">
+            <a:avLst/>
+          </a:prstGeom>
+        </p:spPr>
+      </p:pic>
+      <p:sp>
+        <p:nvSpPr>
+          <p:cNvPr id="5" name="Text 1"/>
+          <p:cNvSpPr/>
+          <p:nvPr/>
+        </p:nvSpPr>
+        <p:spPr>
+          <a:xfrm>
+            <a:off x="548640" y="1188720"/>
+            <a:ext cx="8046720" cy="457200"/>
+          </a:xfrm>
+          <a:prstGeom prst="rect">
+            <a:avLst/>
+          </a:prstGeom>
+          <a:noFill/>
+          <a:ln/>
+        </p:spPr>
+        <p:txBody>
+          <a:bodyPr wrap="square" lIns="0" tIns="0" rIns="0" bIns="0" rtlCol="0" anchor="ctr"/>
+          <a:lstStyle/>
+          <a:p>
+            <a:pPr marL="0" indent="0" algn="r">
+              <a:buNone/>
+            </a:pPr>
+            <a:r>
+              <a:rPr lang="en-US" sz="2800" b="1" dirty="0">
+                <a:solidFill>
+                  <a:srgbClr val="F8FAFC"/>
+                </a:solidFill>
+                <a:latin typeface="Vazirmatn" pitchFamily="2" charset="-78"/>
+                <a:ea typeface="Arial" pitchFamily="34" charset="-122"/>
+                <a:cs typeface="Vazirmatn" pitchFamily="2" charset="-78"/>
+              </a:rPr>
+              <a:t>چشم‌انداز</a:t>
+            </a:r>
+            <a:endParaRPr lang="en-US" sz="2800" dirty="0">
+              <a:latin typeface="Vazirmatn" pitchFamily="2" charset="-78"/>
+              <a:cs typeface="Vazirmatn" pitchFamily="2" charset="-78"/>
+            </a:endParaRPr>
+          </a:p>
+        </p:txBody>
+      </p:sp>
+      <p:pic>
+        <p:nvPicPr>
+          <p:cNvPr id="6" name="Image 2" descr="preencoded.png"/>
+          <p:cNvPicPr>
+            <a:picLocks noChangeAspect="1"/>
+          </p:cNvPicPr>
+          <p:nvPr/>
+        </p:nvPicPr>
+        <p:blipFill>
+          <a:blip r:embed="rId5"/>
+          <a:stretch>
+            <a:fillRect/>
+          </a:stretch>
+        </p:blipFill>
+        <p:spPr>
+          <a:xfrm>
+            <a:off x="6217920" y="1737360"/>
+            <a:ext cx="2194560" cy="54864"/>
+          </a:xfrm>
+          <a:prstGeom prst="rect">
+            <a:avLst/>
+          </a:prstGeom>
+        </p:spPr>
+      </p:pic>
+      <p:sp>
+        <p:nvSpPr>
+          <p:cNvPr id="7" name="Text 2"/>
+          <p:cNvSpPr/>
+          <p:nvPr/>
+        </p:nvSpPr>
+        <p:spPr>
+          <a:xfrm>
+            <a:off x="1097280" y="2103120"/>
+            <a:ext cx="6858000" cy="1645920"/>
+          </a:xfrm>
+          <a:prstGeom prst="rect">
+            <a:avLst/>
+          </a:prstGeom>
+          <a:noFill/>
+          <a:ln/>
+        </p:spPr>
+        <p:txBody>
+          <a:bodyPr wrap="square" lIns="0" tIns="0" rIns="0" bIns="0" rtlCol="0" anchor="ctr"/>
+          <a:lstStyle/>
+          <a:p>
+            <a:pPr marL="0" indent="0" algn="r">
+              <a:buNone/>
+            </a:pPr>
+            <a:r>
+              <a:rPr lang="en-US" sz="1600" dirty="0">
+                <a:solidFill>
+                  <a:srgbClr val="CBD5E1"/>
+                </a:solidFill>
+                <a:latin typeface="Vazirmatn" pitchFamily="2" charset="-78"/>
+                <a:ea typeface="Arial" pitchFamily="34" charset="-122"/>
+                <a:cs typeface="Vazirmatn" pitchFamily="2" charset="-78"/>
+              </a:rPr>
+              <a:t>SIP فقط یک سیستم مدیریت مدرسه نیست.</a:t>
+            </a:r>
+            <a:endParaRPr lang="en-US" sz="1600" dirty="0">
+              <a:latin typeface="Vazirmatn" pitchFamily="2" charset="-78"/>
+              <a:cs typeface="Vazirmatn" pitchFamily="2" charset="-78"/>
+            </a:endParaRPr>
+          </a:p>
+          <a:p>
+            <a:pPr marL="0" indent="0" algn="r">
+              <a:buNone/>
+            </a:pPr>
+            <a:r>
+              <a:rPr lang="en-US" sz="1600" dirty="0">
+                <a:solidFill>
+                  <a:srgbClr val="CBD5E1"/>
+                </a:solidFill>
+                <a:latin typeface="Vazirmatn" pitchFamily="2" charset="-78"/>
+                <a:ea typeface="Arial" pitchFamily="34" charset="-122"/>
+                <a:cs typeface="Vazirmatn" pitchFamily="2" charset="-78"/>
+              </a:rPr>
+              <a:t>یک سامانه تحلیل، پیش‌بینی و تصمیم‌یار آموزشی است که با تمرکز بر حل مسائل واقعی نظام آموزشی طراحی شده تا کیفیت آموزش را بالا ببرد و به همه نقش‌ها کمک کند تصمیم‌های دقیق‌تری بگیرند.</a:t>
+            </a:r>
+            <a:endParaRPr lang="en-US" sz="1600" dirty="0">
+              <a:latin typeface="Vazirmatn" pitchFamily="2" charset="-78"/>
+              <a:cs typeface="Vazirmatn" pitchFamily="2" charset="-78"/>
+            </a:endParaRPr>
+          </a:p>
+        </p:txBody>
+      </p:sp>
+      <p:sp>
+        <p:nvSpPr>
+          <p:cNvPr id="8" name="Text 3"/>
+          <p:cNvSpPr/>
+          <p:nvPr/>
+        </p:nvSpPr>
+        <p:spPr>
+          <a:xfrm>
+            <a:off x="1097280" y="4023360"/>
+            <a:ext cx="6858000" cy="320040"/>
+          </a:xfrm>
+          <a:prstGeom prst="rect">
+            <a:avLst/>
+          </a:prstGeom>
+          <a:noFill/>
+          <a:ln/>
+        </p:spPr>
+        <p:txBody>
+          <a:bodyPr wrap="square" lIns="0" tIns="0" rIns="0" bIns="0" rtlCol="0" anchor="ctr"/>
+          <a:lstStyle/>
+          <a:p>
+            <a:pPr marL="0" indent="0" algn="r">
+              <a:buNone/>
+            </a:pPr>
+            <a:r>
+              <a:rPr lang="en-US" sz="1400" b="1" dirty="0">
+                <a:solidFill>
+                  <a:srgbClr val="FF4D7A"/>
+                </a:solidFill>
+                <a:latin typeface="Vazirmatn" pitchFamily="2" charset="-78"/>
+                <a:ea typeface="Arial" pitchFamily="34" charset="-122"/>
+                <a:cs typeface="Vazirmatn" pitchFamily="2" charset="-78"/>
+              </a:rPr>
+              <a:t>الگوریتم‌محور  ·  داده‌محور  ·  کاربرمحور</a:t>
+            </a:r>
+            <a:endParaRPr lang="en-US" sz="1400" dirty="0">
+              <a:latin typeface="Vazirmatn" pitchFamily="2" charset="-78"/>
+              <a:cs typeface="Vazirmatn" pitchFamily="2" charset="-78"/>
+            </a:endParaRPr>
+          </a:p>
+        </p:txBody>
+      </p:sp>
+    </p:spTree>
+  </p:cSld>
+  <p:clrMapOvr>
+    <a:masterClrMapping/>
+  </p:clrMapOvr>
+  <mc:AlternateContent xmlns:mc="http://schemas.openxmlformats.org/markup-compatibility/2006" xmlns:p159="http://schemas.microsoft.com/office/powerpoint/2015/09/main">
+    <mc:Choice Requires="p159">
+      <p:transition xmlns:p14="http://schemas.microsoft.com/office/powerpoint/2010/main" spd="slow" p14:dur="2000">
+        <p159:morph option="byChar"/>
+      </p:transition>
+    </mc:Choice>
+    <mc:Fallback xmlns="">
+      <p:transition spd="slow">
+        <p:fade/>
+      </p:transition>
+    </mc:Fallback>
+  </mc:AlternateContent>
+</p:sld>
+</file>
+
+<file path=ppt/slides/slide11.xml><?xml version="1.0" encoding="utf-8"?>
 <p:sld xmlns:a="http://schemas.openxmlformats.org/drawingml/2006/main" xmlns:r="http://schemas.openxmlformats.org/officeDocument/2006/relationships" xmlns:p="http://schemas.openxmlformats.org/presentationml/2006/main">
   <p:cSld name="Slide 11">
     <p:bg>
@@ -1850,9 +2056,340 @@
           <a:ln/>
         </p:spPr>
       </p:sp>
+      <p:sp>
+        <p:nvSpPr>
+          <p:cNvPr id="7" name="Text 2"/>
+          <p:cNvSpPr/>
+          <p:nvPr/>
+        </p:nvSpPr>
+        <p:spPr>
+          <a:xfrm>
+            <a:off x="457200" y="2331720"/>
+            <a:ext cx="8229600" cy="411480"/>
+          </a:xfrm>
+          <a:prstGeom prst="rect">
+            <a:avLst/>
+          </a:prstGeom>
+          <a:noFill/>
+          <a:ln/>
+        </p:spPr>
+        <p:txBody>
+          <a:bodyPr wrap="square" lIns="0" tIns="0" rIns="0" bIns="0" rtlCol="0" anchor="ctr"/>
+          <a:lstStyle/>
+          <a:p>
+            <a:pPr marL="0" indent="0" algn="ctr">
+              <a:buNone/>
+            </a:pPr>
+            <a:r>
+              <a:rPr lang="en-US" sz="2600" b="1" dirty="0">
+                <a:solidFill>
+                  <a:srgbClr val="F8FAFC"/>
+                </a:solidFill>
+                <a:latin typeface="Vazirmatn" pitchFamily="2" charset="-78"/>
+                <a:ea typeface="Arial" pitchFamily="34" charset="-122"/>
+                <a:cs typeface="Vazirmatn" pitchFamily="2" charset="-78"/>
+              </a:rPr>
+              <a:t>School Intelligence Platform</a:t>
+            </a:r>
+            <a:endParaRPr lang="en-US" sz="2600" dirty="0">
+              <a:latin typeface="Vazirmatn" pitchFamily="2" charset="-78"/>
+              <a:cs typeface="Vazirmatn" pitchFamily="2" charset="-78"/>
+            </a:endParaRPr>
+          </a:p>
+        </p:txBody>
+      </p:sp>
+      <p:sp>
+        <p:nvSpPr>
+          <p:cNvPr id="8" name="Text 3"/>
+          <p:cNvSpPr/>
+          <p:nvPr/>
+        </p:nvSpPr>
+        <p:spPr>
+          <a:xfrm>
+            <a:off x="457200" y="2834640"/>
+            <a:ext cx="8229600" cy="320040"/>
+          </a:xfrm>
+          <a:prstGeom prst="rect">
+            <a:avLst/>
+          </a:prstGeom>
+          <a:noFill/>
+          <a:ln/>
+        </p:spPr>
+        <p:txBody>
+          <a:bodyPr wrap="square" lIns="0" tIns="0" rIns="0" bIns="0" rtlCol="0" anchor="ctr"/>
+          <a:lstStyle/>
+          <a:p>
+            <a:pPr marL="0" indent="0" algn="ctr">
+              <a:buNone/>
+            </a:pPr>
+            <a:r>
+              <a:rPr lang="en-US" sz="1600" dirty="0">
+                <a:solidFill>
+                  <a:srgbClr val="CBD5E1"/>
+                </a:solidFill>
+                <a:latin typeface="Vazirmatn" pitchFamily="2" charset="-78"/>
+                <a:ea typeface="Arial" pitchFamily="34" charset="-122"/>
+                <a:cs typeface="Vazirmatn" pitchFamily="2" charset="-78"/>
+              </a:rPr>
+              <a:t>سامانه هوشمند مدیریت مدارس</a:t>
+            </a:r>
+            <a:endParaRPr lang="en-US" sz="1600" dirty="0">
+              <a:latin typeface="Vazirmatn" pitchFamily="2" charset="-78"/>
+              <a:cs typeface="Vazirmatn" pitchFamily="2" charset="-78"/>
+            </a:endParaRPr>
+          </a:p>
+        </p:txBody>
+      </p:sp>
+      <p:sp>
+        <p:nvSpPr>
+          <p:cNvPr id="10" name="Text 4"/>
+          <p:cNvSpPr/>
+          <p:nvPr/>
+        </p:nvSpPr>
+        <p:spPr>
+          <a:xfrm>
+            <a:off x="457200" y="3611880"/>
+            <a:ext cx="8229600" cy="274320"/>
+          </a:xfrm>
+          <a:prstGeom prst="rect">
+            <a:avLst/>
+          </a:prstGeom>
+          <a:noFill/>
+          <a:ln/>
+        </p:spPr>
+        <p:txBody>
+          <a:bodyPr wrap="square" lIns="0" tIns="0" rIns="0" bIns="0" rtlCol="0" anchor="ctr"/>
+          <a:lstStyle/>
+          <a:p>
+            <a:pPr marL="0" indent="0" algn="ctr">
+              <a:buNone/>
+            </a:pPr>
+            <a:endParaRPr lang="en-US" sz="1300" dirty="0">
+              <a:latin typeface="Vazirmatn" pitchFamily="2" charset="-78"/>
+              <a:cs typeface="Vazirmatn" pitchFamily="2" charset="-78"/>
+            </a:endParaRPr>
+          </a:p>
+        </p:txBody>
+      </p:sp>
+      <p:sp>
+        <p:nvSpPr>
+          <p:cNvPr id="11" name="Text 5"/>
+          <p:cNvSpPr/>
+          <p:nvPr/>
+        </p:nvSpPr>
+        <p:spPr>
+          <a:xfrm>
+            <a:off x="457200" y="4617720"/>
+            <a:ext cx="8229600" cy="228600"/>
+          </a:xfrm>
+          <a:prstGeom prst="rect">
+            <a:avLst/>
+          </a:prstGeom>
+          <a:noFill/>
+          <a:ln/>
+        </p:spPr>
+        <p:txBody>
+          <a:bodyPr wrap="square" lIns="0" tIns="0" rIns="0" bIns="0" rtlCol="0" anchor="ctr"/>
+          <a:lstStyle/>
+          <a:p>
+            <a:pPr marL="0" indent="0" algn="ctr">
+              <a:buNone/>
+            </a:pPr>
+            <a:endParaRPr lang="en-US" sz="1100" dirty="0">
+              <a:latin typeface="Vazirmatn" pitchFamily="2" charset="-78"/>
+              <a:cs typeface="Vazirmatn" pitchFamily="2" charset="-78"/>
+            </a:endParaRPr>
+          </a:p>
+        </p:txBody>
+      </p:sp>
       <p:pic>
         <p:nvPicPr>
-          <p:cNvPr id="6" name="Image 2" descr="preencoded.png"/>
+          <p:cNvPr id="9" name="Graphic 8">
+            <a:extLst>
+              <a:ext uri="{FF2B5EF4-FFF2-40B4-BE49-F238E27FC236}">
+                <a16:creationId xmlns:a16="http://schemas.microsoft.com/office/drawing/2014/main" id="{19F4A368-706E-A2F4-89DA-174F2C7AE464}"/>
+              </a:ext>
+            </a:extLst>
+          </p:cNvPr>
+          <p:cNvPicPr>
+            <a:picLocks noChangeAspect="1"/>
+          </p:cNvPicPr>
+          <p:nvPr/>
+        </p:nvPicPr>
+        <p:blipFill>
+          <a:blip>
+            <a:extLst>
+              <a:ext uri="{96DAC541-7B7A-43D3-8B79-37D633B846F1}">
+                <asvg:svgBlip xmlns:asvg="http://schemas.microsoft.com/office/drawing/2016/SVG/main" r:embed="rId5"/>
+              </a:ext>
+            </a:extLst>
+          </a:blip>
+          <a:stretch>
+            <a:fillRect/>
+          </a:stretch>
+        </p:blipFill>
+        <p:spPr>
+          <a:xfrm>
+            <a:off x="4171300" y="1104900"/>
+            <a:ext cx="796925" cy="796925"/>
+          </a:xfrm>
+          <a:prstGeom prst="rect">
+            <a:avLst/>
+          </a:prstGeom>
+        </p:spPr>
+      </p:pic>
+    </p:spTree>
+  </p:cSld>
+  <p:clrMapOvr>
+    <a:masterClrMapping/>
+  </p:clrMapOvr>
+  <mc:AlternateContent xmlns:mc="http://schemas.openxmlformats.org/markup-compatibility/2006" xmlns:p159="http://schemas.microsoft.com/office/powerpoint/2015/09/main">
+    <mc:Choice Requires="p159">
+      <p:transition xmlns:p14="http://schemas.microsoft.com/office/powerpoint/2010/main" spd="slow" p14:dur="2000">
+        <p159:morph option="byChar"/>
+      </p:transition>
+    </mc:Choice>
+    <mc:Fallback xmlns="">
+      <p:transition spd="slow">
+        <p:fade/>
+      </p:transition>
+    </mc:Fallback>
+  </mc:AlternateContent>
+</p:sld>
+</file>
+
+<file path=ppt/slides/slide2.xml><?xml version="1.0" encoding="utf-8"?>
+<p:sld xmlns:a="http://schemas.openxmlformats.org/drawingml/2006/main" xmlns:r="http://schemas.openxmlformats.org/officeDocument/2006/relationships" xmlns:p="http://schemas.openxmlformats.org/presentationml/2006/main">
+  <p:cSld>
+    <p:bg>
+      <p:bgPr>
+        <a:solidFill>
+          <a:srgbClr val="070B14"/>
+        </a:solidFill>
+        <a:effectLst/>
+      </p:bgPr>
+    </p:bg>
+    <p:spTree>
+      <p:nvGrpSpPr>
+        <p:cNvPr id="1" name="">
+          <a:extLst>
+            <a:ext uri="{FF2B5EF4-FFF2-40B4-BE49-F238E27FC236}">
+              <a16:creationId xmlns:a16="http://schemas.microsoft.com/office/drawing/2014/main" id="{ADC9BEE2-0A74-2FB5-CBA6-4F8324D6C3C7}"/>
+            </a:ext>
+          </a:extLst>
+        </p:cNvPr>
+        <p:cNvGrpSpPr/>
+        <p:nvPr/>
+      </p:nvGrpSpPr>
+      <p:grpSpPr>
+        <a:xfrm>
+          <a:off x="0" y="0"/>
+          <a:ext cx="0" cy="0"/>
+          <a:chOff x="0" y="0"/>
+          <a:chExt cx="0" cy="0"/>
+        </a:xfrm>
+      </p:grpSpPr>
+      <p:pic>
+        <p:nvPicPr>
+          <p:cNvPr id="2" name="Image 0" descr="preencoded.png">
+            <a:extLst>
+              <a:ext uri="{FF2B5EF4-FFF2-40B4-BE49-F238E27FC236}">
+                <a16:creationId xmlns:a16="http://schemas.microsoft.com/office/drawing/2014/main" id="{AC1F875C-CC0E-1BE2-E5D8-8FC42B921F62}"/>
+              </a:ext>
+            </a:extLst>
+          </p:cNvPr>
+          <p:cNvPicPr>
+            <a:picLocks noChangeAspect="1"/>
+          </p:cNvPicPr>
+          <p:nvPr/>
+        </p:nvPicPr>
+        <p:blipFill>
+          <a:blip r:embed="rId3">
+            <a:alphaModFix amt="85000"/>
+          </a:blip>
+          <a:stretch>
+            <a:fillRect/>
+          </a:stretch>
+        </p:blipFill>
+        <p:spPr>
+          <a:xfrm>
+            <a:off x="1828800" y="-731520"/>
+            <a:ext cx="8229600" cy="8229600"/>
+          </a:xfrm>
+          <a:prstGeom prst="rect">
+            <a:avLst/>
+          </a:prstGeom>
+        </p:spPr>
+      </p:pic>
+      <p:pic>
+        <p:nvPicPr>
+          <p:cNvPr id="3" name="Image 1" descr="preencoded.png">
+            <a:extLst>
+              <a:ext uri="{FF2B5EF4-FFF2-40B4-BE49-F238E27FC236}">
+                <a16:creationId xmlns:a16="http://schemas.microsoft.com/office/drawing/2014/main" id="{69F74DC4-3797-873F-A601-0088E2239421}"/>
+              </a:ext>
+            </a:extLst>
+          </p:cNvPr>
+          <p:cNvPicPr>
+            <a:picLocks noChangeAspect="1"/>
+          </p:cNvPicPr>
+          <p:nvPr/>
+        </p:nvPicPr>
+        <p:blipFill>
+          <a:blip r:embed="rId4">
+            <a:alphaModFix amt="30000"/>
+          </a:blip>
+          <a:stretch>
+            <a:fillRect/>
+          </a:stretch>
+        </p:blipFill>
+        <p:spPr>
+          <a:xfrm>
+            <a:off x="0" y="0"/>
+            <a:ext cx="9144000" cy="5143500"/>
+          </a:xfrm>
+          <a:prstGeom prst="rect">
+            <a:avLst/>
+          </a:prstGeom>
+        </p:spPr>
+      </p:pic>
+      <p:sp>
+        <p:nvSpPr>
+          <p:cNvPr id="5" name="Shape 1">
+            <a:extLst>
+              <a:ext uri="{FF2B5EF4-FFF2-40B4-BE49-F238E27FC236}">
+                <a16:creationId xmlns:a16="http://schemas.microsoft.com/office/drawing/2014/main" id="{DD653B3D-6C4A-0DFE-8750-A158774C7CEB}"/>
+              </a:ext>
+            </a:extLst>
+          </p:cNvPr>
+          <p:cNvSpPr/>
+          <p:nvPr/>
+        </p:nvSpPr>
+        <p:spPr>
+          <a:xfrm>
+            <a:off x="502920" y="1051560"/>
+            <a:ext cx="2194560" cy="347472"/>
+          </a:xfrm>
+          <a:prstGeom prst="roundRect">
+            <a:avLst>
+              <a:gd name="adj" fmla="val 50000"/>
+            </a:avLst>
+          </a:prstGeom>
+          <a:solidFill>
+            <a:srgbClr val="1A2436"/>
+          </a:solidFill>
+          <a:ln/>
+        </p:spPr>
+      </p:sp>
+      <p:pic>
+        <p:nvPicPr>
+          <p:cNvPr id="6" name="Image 2" descr="preencoded.png">
+            <a:extLst>
+              <a:ext uri="{FF2B5EF4-FFF2-40B4-BE49-F238E27FC236}">
+                <a16:creationId xmlns:a16="http://schemas.microsoft.com/office/drawing/2014/main" id="{35BC9FB4-3256-6DB1-9F89-B0BEA5B255BD}"/>
+              </a:ext>
+            </a:extLst>
+          </p:cNvPr>
           <p:cNvPicPr>
             <a:picLocks noChangeAspect="1"/>
           </p:cNvPicPr>
@@ -1866,8 +2403,8 @@
         </p:blipFill>
         <p:spPr>
           <a:xfrm>
-            <a:off x="4160520" y="1097280"/>
-            <a:ext cx="822960" cy="822960"/>
+            <a:off x="621792" y="1133856"/>
+            <a:ext cx="182880" cy="182880"/>
           </a:xfrm>
           <a:prstGeom prst="rect">
             <a:avLst/>
@@ -1876,30 +2413,84 @@
       </p:pic>
       <p:sp>
         <p:nvSpPr>
-          <p:cNvPr id="7" name="Text 2"/>
-          <p:cNvSpPr/>
-          <p:nvPr/>
-        </p:nvSpPr>
-        <p:spPr>
-          <a:xfrm>
-            <a:off x="457200" y="2331720"/>
-            <a:ext cx="8229600" cy="411480"/>
-          </a:xfrm>
-          <a:prstGeom prst="rect">
-            <a:avLst/>
-          </a:prstGeom>
-          <a:noFill/>
-          <a:ln/>
-        </p:spPr>
-        <p:txBody>
-          <a:bodyPr wrap="square" lIns="0" tIns="0" rIns="0" bIns="0" rtlCol="0" anchor="ctr"/>
-          <a:lstStyle/>
-          <a:p>
-            <a:pPr marL="0" indent="0" algn="ctr">
-              <a:buNone/>
-            </a:pPr>
-            <a:r>
-              <a:rPr lang="en-US" sz="2600" b="1" dirty="0">
+          <p:cNvPr id="7" name="Text 2">
+            <a:extLst>
+              <a:ext uri="{FF2B5EF4-FFF2-40B4-BE49-F238E27FC236}">
+                <a16:creationId xmlns:a16="http://schemas.microsoft.com/office/drawing/2014/main" id="{41C6714C-0F9C-9F8E-3A8A-EB6AD435A720}"/>
+              </a:ext>
+            </a:extLst>
+          </p:cNvPr>
+          <p:cNvSpPr/>
+          <p:nvPr/>
+        </p:nvSpPr>
+        <p:spPr>
+          <a:xfrm>
+            <a:off x="868680" y="1078992"/>
+            <a:ext cx="1691640" cy="292608"/>
+          </a:xfrm>
+          <a:prstGeom prst="rect">
+            <a:avLst/>
+          </a:prstGeom>
+          <a:noFill/>
+          <a:ln/>
+        </p:spPr>
+        <p:txBody>
+          <a:bodyPr wrap="square" lIns="0" tIns="0" rIns="0" bIns="0" rtlCol="0" anchor="ctr"/>
+          <a:lstStyle/>
+          <a:p>
+            <a:pPr marL="0" indent="0" algn="r">
+              <a:buNone/>
+            </a:pPr>
+            <a:r>
+              <a:rPr lang="en-US" sz="1200" dirty="0">
+                <a:solidFill>
+                  <a:srgbClr val="FF4D7A"/>
+                </a:solidFill>
+                <a:latin typeface="Vazirmatn" pitchFamily="2" charset="-78"/>
+                <a:ea typeface="Arial" pitchFamily="34" charset="-122"/>
+                <a:cs typeface="Vazirmatn" pitchFamily="2" charset="-78"/>
+              </a:rPr>
+              <a:t>جشنواره خوارزمی</a:t>
+            </a:r>
+            <a:endParaRPr lang="en-US" sz="1200" dirty="0">
+              <a:latin typeface="Vazirmatn" pitchFamily="2" charset="-78"/>
+              <a:cs typeface="Vazirmatn" pitchFamily="2" charset="-78"/>
+            </a:endParaRPr>
+          </a:p>
+        </p:txBody>
+      </p:sp>
+      <p:sp>
+        <p:nvSpPr>
+          <p:cNvPr id="8" name="Text 3">
+            <a:extLst>
+              <a:ext uri="{FF2B5EF4-FFF2-40B4-BE49-F238E27FC236}">
+                <a16:creationId xmlns:a16="http://schemas.microsoft.com/office/drawing/2014/main" id="{70901751-66B7-443B-255E-D46C1B2D2C86}"/>
+              </a:ext>
+            </a:extLst>
+          </p:cNvPr>
+          <p:cNvSpPr/>
+          <p:nvPr/>
+        </p:nvSpPr>
+        <p:spPr>
+          <a:xfrm>
+            <a:off x="2331720" y="1078992"/>
+            <a:ext cx="5943600" cy="1371600"/>
+          </a:xfrm>
+          <a:prstGeom prst="rect">
+            <a:avLst/>
+          </a:prstGeom>
+          <a:noFill/>
+          <a:ln/>
+        </p:spPr>
+        <p:txBody>
+          <a:bodyPr wrap="square" lIns="0" tIns="0" rIns="0" bIns="0" rtlCol="0" anchor="t"/>
+          <a:lstStyle/>
+          <a:p>
+            <a:pPr marL="0" indent="0" algn="r">
+              <a:buNone/>
+            </a:pPr>
+            <a:r>
+              <a:rPr lang="en-US" sz="3600" b="1" dirty="0">
                 <a:solidFill>
                   <a:srgbClr val="F8FAFC"/>
                 </a:solidFill>
@@ -1907,49 +2498,75 @@
                 <a:ea typeface="Arial" pitchFamily="34" charset="-122"/>
                 <a:cs typeface="Vazirmatn" pitchFamily="2" charset="-78"/>
               </a:rPr>
-              <a:t>School Intelligence Platform</a:t>
-            </a:r>
-            <a:endParaRPr lang="en-US" sz="2600" dirty="0">
-              <a:latin typeface="Vazirmatn" pitchFamily="2" charset="-78"/>
-              <a:cs typeface="Vazirmatn" pitchFamily="2" charset="-78"/>
-            </a:endParaRPr>
-          </a:p>
-        </p:txBody>
-      </p:sp>
-      <p:sp>
-        <p:nvSpPr>
-          <p:cNvPr id="8" name="Text 3"/>
-          <p:cNvSpPr/>
-          <p:nvPr/>
-        </p:nvSpPr>
-        <p:spPr>
-          <a:xfrm>
-            <a:off x="457200" y="2834640"/>
-            <a:ext cx="8229600" cy="320040"/>
-          </a:xfrm>
-          <a:prstGeom prst="rect">
-            <a:avLst/>
-          </a:prstGeom>
-          <a:noFill/>
-          <a:ln/>
-        </p:spPr>
-        <p:txBody>
-          <a:bodyPr wrap="square" lIns="0" tIns="0" rIns="0" bIns="0" rtlCol="0" anchor="ctr"/>
-          <a:lstStyle/>
-          <a:p>
-            <a:pPr marL="0" indent="0" algn="ctr">
+              <a:t>سامانه هوشمند</a:t>
+            </a:r>
+            <a:endParaRPr lang="en-US" sz="3600" dirty="0">
+              <a:latin typeface="Vazirmatn" pitchFamily="2" charset="-78"/>
+              <a:cs typeface="Vazirmatn" pitchFamily="2" charset="-78"/>
+            </a:endParaRPr>
+          </a:p>
+          <a:p>
+            <a:pPr marL="0" indent="0" algn="r">
+              <a:buNone/>
+            </a:pPr>
+            <a:r>
+              <a:rPr lang="en-US" sz="3600" b="1" dirty="0">
+                <a:solidFill>
+                  <a:srgbClr val="F8FAFC"/>
+                </a:solidFill>
+                <a:latin typeface="Vazirmatn" pitchFamily="2" charset="-78"/>
+                <a:ea typeface="Arial" pitchFamily="34" charset="-122"/>
+                <a:cs typeface="Vazirmatn" pitchFamily="2" charset="-78"/>
+              </a:rPr>
+              <a:t>مدیریت مدارس</a:t>
+            </a:r>
+            <a:endParaRPr lang="en-US" sz="3600" dirty="0">
+              <a:latin typeface="Vazirmatn" pitchFamily="2" charset="-78"/>
+              <a:cs typeface="Vazirmatn" pitchFamily="2" charset="-78"/>
+            </a:endParaRPr>
+          </a:p>
+        </p:txBody>
+      </p:sp>
+      <p:sp>
+        <p:nvSpPr>
+          <p:cNvPr id="9" name="Text 4">
+            <a:extLst>
+              <a:ext uri="{FF2B5EF4-FFF2-40B4-BE49-F238E27FC236}">
+                <a16:creationId xmlns:a16="http://schemas.microsoft.com/office/drawing/2014/main" id="{0FA67D7D-A7C9-FBEA-3A8E-C2D35D043A9E}"/>
+              </a:ext>
+            </a:extLst>
+          </p:cNvPr>
+          <p:cNvSpPr/>
+          <p:nvPr/>
+        </p:nvSpPr>
+        <p:spPr>
+          <a:xfrm>
+            <a:off x="2331720" y="2542032"/>
+            <a:ext cx="5943600" cy="320040"/>
+          </a:xfrm>
+          <a:prstGeom prst="rect">
+            <a:avLst/>
+          </a:prstGeom>
+          <a:noFill/>
+          <a:ln/>
+        </p:spPr>
+        <p:txBody>
+          <a:bodyPr wrap="square" lIns="0" tIns="0" rIns="0" bIns="0" rtlCol="0" anchor="ctr"/>
+          <a:lstStyle/>
+          <a:p>
+            <a:pPr marL="0" indent="0" algn="r">
               <a:buNone/>
             </a:pPr>
             <a:r>
               <a:rPr lang="en-US" sz="1600" dirty="0">
                 <a:solidFill>
-                  <a:srgbClr val="CBD5E1"/>
-                </a:solidFill>
-                <a:latin typeface="Vazirmatn" pitchFamily="2" charset="-78"/>
-                <a:ea typeface="Arial" pitchFamily="34" charset="-122"/>
-                <a:cs typeface="Vazirmatn" pitchFamily="2" charset="-78"/>
-              </a:rPr>
-              <a:t>سامانه هوشمند مدیریت مدارس</a:t>
+                  <a:srgbClr val="4C7CF0"/>
+                </a:solidFill>
+                <a:latin typeface="Vazirmatn" pitchFamily="2" charset="-78"/>
+                <a:ea typeface="Arial" pitchFamily="34" charset="-122"/>
+                <a:cs typeface="Vazirmatn" pitchFamily="2" charset="-78"/>
+              </a:rPr>
+              <a:t>School Intelligence Platform  ·  SIP</a:t>
             </a:r>
             <a:endParaRPr lang="en-US" sz="1600" dirty="0">
               <a:latin typeface="Vazirmatn" pitchFamily="2" charset="-78"/>
@@ -1958,69 +2575,126 @@
           </a:p>
         </p:txBody>
       </p:sp>
-      <p:sp>
-        <p:nvSpPr>
-          <p:cNvPr id="10" name="Text 4"/>
-          <p:cNvSpPr/>
-          <p:nvPr/>
-        </p:nvSpPr>
-        <p:spPr>
-          <a:xfrm>
-            <a:off x="457200" y="3611880"/>
-            <a:ext cx="8229600" cy="274320"/>
-          </a:xfrm>
-          <a:prstGeom prst="rect">
-            <a:avLst/>
-          </a:prstGeom>
-          <a:noFill/>
-          <a:ln/>
-        </p:spPr>
-        <p:txBody>
-          <a:bodyPr wrap="square" lIns="0" tIns="0" rIns="0" bIns="0" rtlCol="0" anchor="ctr"/>
-          <a:lstStyle/>
-          <a:p>
-            <a:pPr marL="0" indent="0" algn="ctr">
-              <a:buNone/>
-            </a:pPr>
-            <a:endParaRPr lang="en-US" sz="1300" dirty="0">
-              <a:latin typeface="Vazirmatn" pitchFamily="2" charset="-78"/>
-              <a:cs typeface="Vazirmatn" pitchFamily="2" charset="-78"/>
-            </a:endParaRPr>
-          </a:p>
-        </p:txBody>
-      </p:sp>
-      <p:sp>
-        <p:nvSpPr>
-          <p:cNvPr id="11" name="Text 5"/>
-          <p:cNvSpPr/>
-          <p:nvPr/>
-        </p:nvSpPr>
-        <p:spPr>
-          <a:xfrm>
-            <a:off x="457200" y="4617720"/>
-            <a:ext cx="8229600" cy="228600"/>
-          </a:xfrm>
-          <a:prstGeom prst="rect">
-            <a:avLst/>
-          </a:prstGeom>
-          <a:noFill/>
-          <a:ln/>
-        </p:spPr>
-        <p:txBody>
-          <a:bodyPr wrap="square" lIns="0" tIns="0" rIns="0" bIns="0" rtlCol="0" anchor="ctr"/>
-          <a:lstStyle/>
-          <a:p>
-            <a:pPr marL="0" indent="0" algn="ctr">
-              <a:buNone/>
-            </a:pPr>
-            <a:endParaRPr lang="en-US" sz="1100" dirty="0">
-              <a:latin typeface="Vazirmatn" pitchFamily="2" charset="-78"/>
-              <a:cs typeface="Vazirmatn" pitchFamily="2" charset="-78"/>
-            </a:endParaRPr>
-          </a:p>
-        </p:txBody>
-      </p:sp>
+      <p:pic>
+        <p:nvPicPr>
+          <p:cNvPr id="10" name="Image 3" descr="preencoded.png">
+            <a:extLst>
+              <a:ext uri="{FF2B5EF4-FFF2-40B4-BE49-F238E27FC236}">
+                <a16:creationId xmlns:a16="http://schemas.microsoft.com/office/drawing/2014/main" id="{66A1F90C-1838-FA34-6C19-3C5A0134AC9B}"/>
+              </a:ext>
+            </a:extLst>
+          </p:cNvPr>
+          <p:cNvPicPr>
+            <a:picLocks noChangeAspect="1"/>
+          </p:cNvPicPr>
+          <p:nvPr/>
+        </p:nvPicPr>
+        <p:blipFill>
+          <a:blip r:embed="rId6"/>
+          <a:stretch>
+            <a:fillRect/>
+          </a:stretch>
+        </p:blipFill>
+        <p:spPr>
+          <a:xfrm>
+            <a:off x="6035040" y="2999232"/>
+            <a:ext cx="2194560" cy="54864"/>
+          </a:xfrm>
+          <a:prstGeom prst="rect">
+            <a:avLst/>
+          </a:prstGeom>
+        </p:spPr>
+      </p:pic>
+      <p:sp>
+        <p:nvSpPr>
+          <p:cNvPr id="11" name="Text 5">
+            <a:extLst>
+              <a:ext uri="{FF2B5EF4-FFF2-40B4-BE49-F238E27FC236}">
+                <a16:creationId xmlns:a16="http://schemas.microsoft.com/office/drawing/2014/main" id="{B56DB99D-0339-5F7E-D95B-36D13321F978}"/>
+              </a:ext>
+            </a:extLst>
+          </p:cNvPr>
+          <p:cNvSpPr/>
+          <p:nvPr/>
+        </p:nvSpPr>
+        <p:spPr>
+          <a:xfrm>
+            <a:off x="2331720" y="3273552"/>
+            <a:ext cx="5943600" cy="365760"/>
+          </a:xfrm>
+          <a:prstGeom prst="rect">
+            <a:avLst/>
+          </a:prstGeom>
+          <a:noFill/>
+          <a:ln/>
+        </p:spPr>
+        <p:txBody>
+          <a:bodyPr wrap="square" lIns="0" tIns="0" rIns="0" bIns="0" rtlCol="0" anchor="ctr"/>
+          <a:lstStyle/>
+          <a:p>
+            <a:pPr marL="0" indent="0" algn="r">
+              <a:buNone/>
+            </a:pPr>
+            <a:r>
+              <a:rPr lang="en-US" sz="1400" dirty="0">
+                <a:solidFill>
+                  <a:srgbClr val="94A3B8"/>
+                </a:solidFill>
+                <a:latin typeface="Vazirmatn" pitchFamily="2" charset="-78"/>
+                <a:ea typeface="Arial" pitchFamily="34" charset="-122"/>
+                <a:cs typeface="Vazirmatn" pitchFamily="2" charset="-78"/>
+              </a:rPr>
+              <a:t>تصمیم‌یار آموزشی مبتنی بر الگوریتم — نه فقط حضور و نمره</a:t>
+            </a:r>
+            <a:endParaRPr lang="en-US" sz="1400" dirty="0">
+              <a:latin typeface="Vazirmatn" pitchFamily="2" charset="-78"/>
+              <a:cs typeface="Vazirmatn" pitchFamily="2" charset="-78"/>
+            </a:endParaRPr>
+          </a:p>
+        </p:txBody>
+      </p:sp>
+      <p:pic>
+        <p:nvPicPr>
+          <p:cNvPr id="12" name="Graphic 11">
+            <a:extLst>
+              <a:ext uri="{FF2B5EF4-FFF2-40B4-BE49-F238E27FC236}">
+                <a16:creationId xmlns:a16="http://schemas.microsoft.com/office/drawing/2014/main" id="{18E3FAE1-90F0-48D9-EC81-1B2E8B80DE4A}"/>
+              </a:ext>
+            </a:extLst>
+          </p:cNvPr>
+          <p:cNvPicPr>
+            <a:picLocks noChangeAspect="1"/>
+          </p:cNvPicPr>
+          <p:nvPr/>
+        </p:nvPicPr>
+        <p:blipFill>
+          <a:blip>
+            <a:extLst>
+              <a:ext uri="{96DAC541-7B7A-43D3-8B79-37D633B846F1}">
+                <asvg:svgBlip xmlns:asvg="http://schemas.microsoft.com/office/drawing/2016/SVG/main" r:embed="rId7"/>
+              </a:ext>
+            </a:extLst>
+          </a:blip>
+          <a:stretch>
+            <a:fillRect/>
+          </a:stretch>
+        </p:blipFill>
+        <p:spPr>
+          <a:xfrm>
+            <a:off x="0" y="0"/>
+            <a:ext cx="545847" cy="545847"/>
+          </a:xfrm>
+          <a:prstGeom prst="rect">
+            <a:avLst/>
+          </a:prstGeom>
+        </p:spPr>
+      </p:pic>
     </p:spTree>
+    <p:extLst>
+      <p:ext uri="{BB962C8B-B14F-4D97-AF65-F5344CB8AC3E}">
+        <p14:creationId xmlns:p14="http://schemas.microsoft.com/office/powerpoint/2010/main" val="337561762"/>
+      </p:ext>
+    </p:extLst>
   </p:cSld>
   <p:clrMapOvr>
     <a:masterClrMapping/>
@@ -2040,7 +2714,7 @@
 </p:sld>
 </file>
 
-<file path=ppt/slides/slide2.xml><?xml version="1.0" encoding="utf-8"?>
+<file path=ppt/slides/slide3.xml><?xml version="1.0" encoding="utf-8"?>
 <p:sld xmlns:a="http://schemas.openxmlformats.org/drawingml/2006/main" xmlns:r="http://schemas.openxmlformats.org/officeDocument/2006/relationships" xmlns:p="http://schemas.openxmlformats.org/presentationml/2006/main">
   <p:cSld name="Slide 2">
     <p:bg>
@@ -2112,7 +2786,7 @@
           <a:bodyPr wrap="square" lIns="0" tIns="0" rIns="0" bIns="0" rtlCol="0" anchor="ctr"/>
           <a:lstStyle/>
           <a:p>
-            <a:pPr marL="0" indent="0" algn="r">
+            <a:pPr marL="0" indent="0" algn="r" rtl="1">
               <a:buNone/>
             </a:pPr>
             <a:r>
@@ -2231,7 +2905,7 @@
           <a:bodyPr wrap="square" lIns="0" tIns="0" rIns="0" bIns="0" rtlCol="0" anchor="ctr"/>
           <a:lstStyle/>
           <a:p>
-            <a:pPr marL="0" indent="0" algn="r">
+            <a:pPr marL="0" indent="0" algn="r" rtl="1">
               <a:buNone/>
             </a:pPr>
             <a:r>
@@ -2243,7 +2917,7 @@
                 <a:ea typeface="Arial" pitchFamily="34" charset="-122"/>
                 <a:cs typeface="Vazirmatn" pitchFamily="2" charset="-78"/>
               </a:rPr>
-              <a:t>SIP یک سامانه مدیریت مدارس نسل جدید است — نه فقط حضور و نمره.</a:t>
+              <a:t> SIP یک سامانه مدیریت مدارس نسل جدید است — نه فقط حضور و نمره.</a:t>
             </a:r>
             <a:endParaRPr lang="en-US" sz="1400" dirty="0">
               <a:latin typeface="Vazirmatn" pitchFamily="2" charset="-78"/>
@@ -2251,7 +2925,7 @@
             </a:endParaRPr>
           </a:p>
           <a:p>
-            <a:pPr marL="0" indent="0" algn="r">
+            <a:pPr marL="0" indent="0" algn="r" rtl="1">
               <a:buNone/>
             </a:pPr>
             <a:r>
@@ -2368,7 +3042,7 @@
           <a:bodyPr wrap="square" lIns="0" tIns="0" rIns="0" bIns="0" rtlCol="0" anchor="ctr"/>
           <a:lstStyle/>
           <a:p>
-            <a:pPr marL="0" indent="0" algn="ctr">
+            <a:pPr marL="0" indent="0" algn="ctr" rtl="1">
               <a:buNone/>
             </a:pPr>
             <a:r>
@@ -2410,7 +3084,7 @@
           <a:bodyPr wrap="square" lIns="0" tIns="0" rIns="0" bIns="0" rtlCol="0" anchor="ctr"/>
           <a:lstStyle/>
           <a:p>
-            <a:pPr marL="0" indent="0" algn="ctr">
+            <a:pPr marL="0" indent="0" algn="ctr" rtl="1">
               <a:buNone/>
             </a:pPr>
             <a:r>
@@ -2527,7 +3201,7 @@
           <a:bodyPr wrap="square" lIns="0" tIns="0" rIns="0" bIns="0" rtlCol="0" anchor="ctr"/>
           <a:lstStyle/>
           <a:p>
-            <a:pPr marL="0" indent="0" algn="ctr">
+            <a:pPr marL="0" indent="0" algn="ctr" rtl="1">
               <a:buNone/>
             </a:pPr>
             <a:r>
@@ -2569,7 +3243,7 @@
           <a:bodyPr wrap="square" lIns="0" tIns="0" rIns="0" bIns="0" rtlCol="0" anchor="ctr"/>
           <a:lstStyle/>
           <a:p>
-            <a:pPr marL="0" indent="0" algn="ctr">
+            <a:pPr marL="0" indent="0" algn="ctr" rtl="1">
               <a:buNone/>
             </a:pPr>
             <a:r>
@@ -2686,7 +3360,7 @@
           <a:bodyPr wrap="square" lIns="0" tIns="0" rIns="0" bIns="0" rtlCol="0" anchor="ctr"/>
           <a:lstStyle/>
           <a:p>
-            <a:pPr marL="0" indent="0" algn="ctr">
+            <a:pPr marL="0" indent="0" algn="ctr" rtl="1">
               <a:buNone/>
             </a:pPr>
             <a:r>
@@ -2728,7 +3402,7 @@
           <a:bodyPr wrap="square" lIns="0" tIns="0" rIns="0" bIns="0" rtlCol="0" anchor="ctr"/>
           <a:lstStyle/>
           <a:p>
-            <a:pPr marL="0" indent="0" algn="ctr">
+            <a:pPr marL="0" indent="0" algn="ctr" rtl="1">
               <a:buNone/>
             </a:pPr>
             <a:r>
@@ -2800,7 +3474,7 @@
           <a:bodyPr rtlCol="0" anchor="ctr"/>
           <a:lstStyle/>
           <a:p>
-            <a:pPr algn="ctr"/>
+            <a:pPr algn="r" rtl="1"/>
             <a:endParaRPr lang="en-US">
               <a:latin typeface="Vazirmatn" pitchFamily="2" charset="-78"/>
               <a:cs typeface="Vazirmatn" pitchFamily="2" charset="-78"/>
@@ -2813,13 +3487,13 @@
   <p:clrMapOvr>
     <a:masterClrMapping/>
   </p:clrMapOvr>
-  <mc:AlternateContent xmlns:mc="http://schemas.openxmlformats.org/markup-compatibility/2006">
-    <mc:Choice xmlns:p159="http://schemas.microsoft.com/office/powerpoint/2015/09/main" Requires="p159">
+  <mc:AlternateContent xmlns:mc="http://schemas.openxmlformats.org/markup-compatibility/2006" xmlns:p159="http://schemas.microsoft.com/office/powerpoint/2015/09/main">
+    <mc:Choice Requires="p159">
       <p:transition xmlns:p14="http://schemas.microsoft.com/office/powerpoint/2010/main" spd="slow" p14:dur="2000">
         <p159:morph option="byChar"/>
       </p:transition>
     </mc:Choice>
-    <mc:Fallback>
+    <mc:Fallback xmlns="">
       <p:transition spd="slow">
         <p:fade/>
       </p:transition>
@@ -2828,7 +3502,7 @@
 </p:sld>
 </file>
 
-<file path=ppt/slides/slide3.xml><?xml version="1.0" encoding="utf-8"?>
+<file path=ppt/slides/slide4.xml><?xml version="1.0" encoding="utf-8"?>
 <p:sld xmlns:a="http://schemas.openxmlformats.org/drawingml/2006/main" xmlns:r="http://schemas.openxmlformats.org/officeDocument/2006/relationships" xmlns:p="http://schemas.openxmlformats.org/presentationml/2006/main">
   <p:cSld name="Slide 3">
     <p:bg>
@@ -4066,13 +4740,13 @@
   <p:clrMapOvr>
     <a:masterClrMapping/>
   </p:clrMapOvr>
-  <mc:AlternateContent xmlns:mc="http://schemas.openxmlformats.org/markup-compatibility/2006">
-    <mc:Choice xmlns:p159="http://schemas.microsoft.com/office/powerpoint/2015/09/main" Requires="p159">
+  <mc:AlternateContent xmlns:mc="http://schemas.openxmlformats.org/markup-compatibility/2006" xmlns:p159="http://schemas.microsoft.com/office/powerpoint/2015/09/main">
+    <mc:Choice Requires="p159">
       <p:transition xmlns:p14="http://schemas.microsoft.com/office/powerpoint/2010/main" spd="slow" p14:dur="2000">
         <p159:morph option="byChar"/>
       </p:transition>
     </mc:Choice>
-    <mc:Fallback>
+    <mc:Fallback xmlns="">
       <p:transition spd="slow">
         <p:fade/>
       </p:transition>
@@ -4081,7 +4755,7 @@
 </p:sld>
 </file>
 
-<file path=ppt/slides/slide4.xml><?xml version="1.0" encoding="utf-8"?>
+<file path=ppt/slides/slide5.xml><?xml version="1.0" encoding="utf-8"?>
 <p:sld xmlns:a="http://schemas.openxmlformats.org/drawingml/2006/main" xmlns:r="http://schemas.openxmlformats.org/officeDocument/2006/relationships" xmlns:p="http://schemas.openxmlformats.org/presentationml/2006/main">
   <p:cSld name="Slide 4">
     <p:bg>
@@ -5724,13 +6398,13 @@
   <p:clrMapOvr>
     <a:masterClrMapping/>
   </p:clrMapOvr>
-  <mc:AlternateContent xmlns:mc="http://schemas.openxmlformats.org/markup-compatibility/2006">
-    <mc:Choice xmlns:p159="http://schemas.microsoft.com/office/powerpoint/2015/09/main" Requires="p159">
+  <mc:AlternateContent xmlns:mc="http://schemas.openxmlformats.org/markup-compatibility/2006" xmlns:p159="http://schemas.microsoft.com/office/powerpoint/2015/09/main">
+    <mc:Choice Requires="p159">
       <p:transition xmlns:p14="http://schemas.microsoft.com/office/powerpoint/2010/main" spd="slow" p14:dur="2000">
         <p159:morph option="byChar"/>
       </p:transition>
     </mc:Choice>
-    <mc:Fallback>
+    <mc:Fallback xmlns="">
       <p:transition spd="slow">
         <p:fade/>
       </p:transition>
@@ -5739,7 +6413,7 @@
 </p:sld>
 </file>
 
-<file path=ppt/slides/slide5.xml><?xml version="1.0" encoding="utf-8"?>
+<file path=ppt/slides/slide6.xml><?xml version="1.0" encoding="utf-8"?>
 <p:sld xmlns:a="http://schemas.openxmlformats.org/drawingml/2006/main" xmlns:r="http://schemas.openxmlformats.org/officeDocument/2006/relationships" xmlns:p="http://schemas.openxmlformats.org/presentationml/2006/main">
   <p:cSld name="Slide 5">
     <p:bg>
@@ -7411,13 +8085,13 @@
   <p:clrMapOvr>
     <a:masterClrMapping/>
   </p:clrMapOvr>
-  <mc:AlternateContent xmlns:mc="http://schemas.openxmlformats.org/markup-compatibility/2006">
-    <mc:Choice xmlns:p159="http://schemas.microsoft.com/office/powerpoint/2015/09/main" Requires="p159">
+  <mc:AlternateContent xmlns:mc="http://schemas.openxmlformats.org/markup-compatibility/2006" xmlns:p159="http://schemas.microsoft.com/office/powerpoint/2015/09/main">
+    <mc:Choice Requires="p159">
       <p:transition xmlns:p14="http://schemas.microsoft.com/office/powerpoint/2010/main" spd="slow" p14:dur="2000">
         <p159:morph option="byChar"/>
       </p:transition>
     </mc:Choice>
-    <mc:Fallback>
+    <mc:Fallback xmlns="">
       <p:transition spd="slow">
         <p:fade/>
       </p:transition>
@@ -7426,7 +8100,7 @@
 </p:sld>
 </file>
 
-<file path=ppt/slides/slide6.xml><?xml version="1.0" encoding="utf-8"?>
+<file path=ppt/slides/slide7.xml><?xml version="1.0" encoding="utf-8"?>
 <p:sld xmlns:a="http://schemas.openxmlformats.org/drawingml/2006/main" xmlns:r="http://schemas.openxmlformats.org/officeDocument/2006/relationships" xmlns:p="http://schemas.openxmlformats.org/presentationml/2006/main">
   <p:cSld name="Slide 6">
     <p:bg>
@@ -8809,13 +9483,13 @@
   <p:clrMapOvr>
     <a:masterClrMapping/>
   </p:clrMapOvr>
-  <mc:AlternateContent xmlns:mc="http://schemas.openxmlformats.org/markup-compatibility/2006">
-    <mc:Choice xmlns:p159="http://schemas.microsoft.com/office/powerpoint/2015/09/main" Requires="p159">
+  <mc:AlternateContent xmlns:mc="http://schemas.openxmlformats.org/markup-compatibility/2006" xmlns:p159="http://schemas.microsoft.com/office/powerpoint/2015/09/main">
+    <mc:Choice Requires="p159">
       <p:transition xmlns:p14="http://schemas.microsoft.com/office/powerpoint/2010/main" spd="slow" p14:dur="2000">
         <p159:morph option="byChar"/>
       </p:transition>
     </mc:Choice>
-    <mc:Fallback>
+    <mc:Fallback xmlns="">
       <p:transition spd="slow">
         <p:fade/>
       </p:transition>
@@ -8824,7 +9498,7 @@
 </p:sld>
 </file>
 
-<file path=ppt/slides/slide7.xml><?xml version="1.0" encoding="utf-8"?>
+<file path=ppt/slides/slide8.xml><?xml version="1.0" encoding="utf-8"?>
 <p:sld xmlns:a="http://schemas.openxmlformats.org/drawingml/2006/main" xmlns:r="http://schemas.openxmlformats.org/officeDocument/2006/relationships" xmlns:p="http://schemas.openxmlformats.org/presentationml/2006/main">
   <p:cSld name="Slide 7">
     <p:bg>
@@ -10002,13 +10676,13 @@
   <p:clrMapOvr>
     <a:masterClrMapping/>
   </p:clrMapOvr>
-  <mc:AlternateContent xmlns:mc="http://schemas.openxmlformats.org/markup-compatibility/2006">
-    <mc:Choice xmlns:p159="http://schemas.microsoft.com/office/powerpoint/2015/09/main" Requires="p159">
+  <mc:AlternateContent xmlns:mc="http://schemas.openxmlformats.org/markup-compatibility/2006" xmlns:p159="http://schemas.microsoft.com/office/powerpoint/2015/09/main">
+    <mc:Choice Requires="p159">
       <p:transition xmlns:p14="http://schemas.microsoft.com/office/powerpoint/2010/main" spd="slow" p14:dur="2000">
         <p159:morph option="byChar"/>
       </p:transition>
     </mc:Choice>
-    <mc:Fallback>
+    <mc:Fallback xmlns="">
       <p:transition spd="slow">
         <p:fade/>
       </p:transition>
@@ -10017,7 +10691,7 @@
 </p:sld>
 </file>
 
-<file path=ppt/slides/slide8.xml><?xml version="1.0" encoding="utf-8"?>
+<file path=ppt/slides/slide9.xml><?xml version="1.0" encoding="utf-8"?>
 <p:sld xmlns:a="http://schemas.openxmlformats.org/drawingml/2006/main" xmlns:r="http://schemas.openxmlformats.org/officeDocument/2006/relationships" xmlns:p="http://schemas.openxmlformats.org/presentationml/2006/main">
   <p:cSld name="Slide 9">
     <p:bg>
@@ -11275,280 +11949,13 @@
   <p:clrMapOvr>
     <a:masterClrMapping/>
   </p:clrMapOvr>
-  <mc:AlternateContent xmlns:mc="http://schemas.openxmlformats.org/markup-compatibility/2006">
-    <mc:Choice xmlns:p159="http://schemas.microsoft.com/office/powerpoint/2015/09/main" Requires="p159">
+  <mc:AlternateContent xmlns:mc="http://schemas.openxmlformats.org/markup-compatibility/2006" xmlns:p159="http://schemas.microsoft.com/office/powerpoint/2015/09/main">
+    <mc:Choice Requires="p159">
       <p:transition xmlns:p14="http://schemas.microsoft.com/office/powerpoint/2010/main" spd="slow" p14:dur="2000">
         <p159:morph option="byChar"/>
       </p:transition>
     </mc:Choice>
-    <mc:Fallback>
-      <p:transition spd="slow">
-        <p:fade/>
-      </p:transition>
-    </mc:Fallback>
-  </mc:AlternateContent>
-</p:sld>
-</file>
-
-<file path=ppt/slides/slide9.xml><?xml version="1.0" encoding="utf-8"?>
-<p:sld xmlns:a="http://schemas.openxmlformats.org/drawingml/2006/main" xmlns:r="http://schemas.openxmlformats.org/officeDocument/2006/relationships" xmlns:p="http://schemas.openxmlformats.org/presentationml/2006/main">
-  <p:cSld name="Slide 10">
-    <p:bg>
-      <p:bgPr>
-        <a:solidFill>
-          <a:srgbClr val="070B14"/>
-        </a:solidFill>
-        <a:effectLst/>
-      </p:bgPr>
-    </p:bg>
-    <p:spTree>
-      <p:nvGrpSpPr>
-        <p:cNvPr id="1" name=""/>
-        <p:cNvGrpSpPr/>
-        <p:nvPr/>
-      </p:nvGrpSpPr>
-      <p:grpSpPr>
-        <a:xfrm>
-          <a:off x="0" y="0"/>
-          <a:ext cx="0" cy="0"/>
-          <a:chOff x="0" y="0"/>
-          <a:chExt cx="0" cy="0"/>
-        </a:xfrm>
-      </p:grpSpPr>
-      <p:pic>
-        <p:nvPicPr>
-          <p:cNvPr id="2" name="Image 0" descr="preencoded.png"/>
-          <p:cNvPicPr>
-            <a:picLocks noChangeAspect="1"/>
-          </p:cNvPicPr>
-          <p:nvPr/>
-        </p:nvPicPr>
-        <p:blipFill>
-          <a:blip r:embed="rId3">
-            <a:alphaModFix amt="70000"/>
-          </a:blip>
-          <a:stretch>
-            <a:fillRect/>
-          </a:stretch>
-        </p:blipFill>
-        <p:spPr>
-          <a:xfrm>
-            <a:off x="-647700" y="1463040"/>
-            <a:ext cx="4572000" cy="4572000"/>
-          </a:xfrm>
-          <a:prstGeom prst="rect">
-            <a:avLst/>
-          </a:prstGeom>
-        </p:spPr>
-      </p:pic>
-      <p:pic>
-        <p:nvPicPr>
-          <p:cNvPr id="3" name="Image 1" descr="preencoded.png"/>
-          <p:cNvPicPr>
-            <a:picLocks noChangeAspect="1"/>
-          </p:cNvPicPr>
-          <p:nvPr/>
-        </p:nvPicPr>
-        <p:blipFill>
-          <a:blip r:embed="rId4">
-            <a:alphaModFix amt="25000"/>
-          </a:blip>
-          <a:stretch>
-            <a:fillRect/>
-          </a:stretch>
-        </p:blipFill>
-        <p:spPr>
-          <a:xfrm>
-            <a:off x="0" y="0"/>
-            <a:ext cx="9144000" cy="5143500"/>
-          </a:xfrm>
-          <a:prstGeom prst="rect">
-            <a:avLst/>
-          </a:prstGeom>
-        </p:spPr>
-      </p:pic>
-      <p:sp>
-        <p:nvSpPr>
-          <p:cNvPr id="5" name="Text 1"/>
-          <p:cNvSpPr/>
-          <p:nvPr/>
-        </p:nvSpPr>
-        <p:spPr>
-          <a:xfrm>
-            <a:off x="548640" y="1188720"/>
-            <a:ext cx="8046720" cy="457200"/>
-          </a:xfrm>
-          <a:prstGeom prst="rect">
-            <a:avLst/>
-          </a:prstGeom>
-          <a:noFill/>
-          <a:ln/>
-        </p:spPr>
-        <p:txBody>
-          <a:bodyPr wrap="square" lIns="0" tIns="0" rIns="0" bIns="0" rtlCol="0" anchor="ctr"/>
-          <a:lstStyle/>
-          <a:p>
-            <a:pPr marL="0" indent="0" algn="r">
-              <a:buNone/>
-            </a:pPr>
-            <a:r>
-              <a:rPr lang="en-US" sz="2800" b="1" dirty="0">
-                <a:solidFill>
-                  <a:srgbClr val="F8FAFC"/>
-                </a:solidFill>
-                <a:latin typeface="Vazirmatn" pitchFamily="2" charset="-78"/>
-                <a:ea typeface="Arial" pitchFamily="34" charset="-122"/>
-                <a:cs typeface="Vazirmatn" pitchFamily="2" charset="-78"/>
-              </a:rPr>
-              <a:t>چشم‌انداز</a:t>
-            </a:r>
-            <a:endParaRPr lang="en-US" sz="2800" dirty="0">
-              <a:latin typeface="Vazirmatn" pitchFamily="2" charset="-78"/>
-              <a:cs typeface="Vazirmatn" pitchFamily="2" charset="-78"/>
-            </a:endParaRPr>
-          </a:p>
-        </p:txBody>
-      </p:sp>
-      <p:pic>
-        <p:nvPicPr>
-          <p:cNvPr id="6" name="Image 2" descr="preencoded.png"/>
-          <p:cNvPicPr>
-            <a:picLocks noChangeAspect="1"/>
-          </p:cNvPicPr>
-          <p:nvPr/>
-        </p:nvPicPr>
-        <p:blipFill>
-          <a:blip r:embed="rId5"/>
-          <a:stretch>
-            <a:fillRect/>
-          </a:stretch>
-        </p:blipFill>
-        <p:spPr>
-          <a:xfrm>
-            <a:off x="6217920" y="1737360"/>
-            <a:ext cx="2194560" cy="54864"/>
-          </a:xfrm>
-          <a:prstGeom prst="rect">
-            <a:avLst/>
-          </a:prstGeom>
-        </p:spPr>
-      </p:pic>
-      <p:sp>
-        <p:nvSpPr>
-          <p:cNvPr id="7" name="Text 2"/>
-          <p:cNvSpPr/>
-          <p:nvPr/>
-        </p:nvSpPr>
-        <p:spPr>
-          <a:xfrm>
-            <a:off x="1097280" y="2103120"/>
-            <a:ext cx="6858000" cy="1645920"/>
-          </a:xfrm>
-          <a:prstGeom prst="rect">
-            <a:avLst/>
-          </a:prstGeom>
-          <a:noFill/>
-          <a:ln/>
-        </p:spPr>
-        <p:txBody>
-          <a:bodyPr wrap="square" lIns="0" tIns="0" rIns="0" bIns="0" rtlCol="0" anchor="ctr"/>
-          <a:lstStyle/>
-          <a:p>
-            <a:pPr marL="0" indent="0" algn="r">
-              <a:buNone/>
-            </a:pPr>
-            <a:r>
-              <a:rPr lang="en-US" sz="1600" dirty="0">
-                <a:solidFill>
-                  <a:srgbClr val="CBD5E1"/>
-                </a:solidFill>
-                <a:latin typeface="Vazirmatn" pitchFamily="2" charset="-78"/>
-                <a:ea typeface="Arial" pitchFamily="34" charset="-122"/>
-                <a:cs typeface="Vazirmatn" pitchFamily="2" charset="-78"/>
-              </a:rPr>
-              <a:t>SIP فقط یک سیستم مدیریت مدرسه نیست.</a:t>
-            </a:r>
-            <a:endParaRPr lang="en-US" sz="1600" dirty="0">
-              <a:latin typeface="Vazirmatn" pitchFamily="2" charset="-78"/>
-              <a:cs typeface="Vazirmatn" pitchFamily="2" charset="-78"/>
-            </a:endParaRPr>
-          </a:p>
-          <a:p>
-            <a:pPr marL="0" indent="0" algn="r">
-              <a:buNone/>
-            </a:pPr>
-            <a:r>
-              <a:rPr lang="en-US" sz="1600" dirty="0">
-                <a:solidFill>
-                  <a:srgbClr val="CBD5E1"/>
-                </a:solidFill>
-                <a:latin typeface="Vazirmatn" pitchFamily="2" charset="-78"/>
-                <a:ea typeface="Arial" pitchFamily="34" charset="-122"/>
-                <a:cs typeface="Vazirmatn" pitchFamily="2" charset="-78"/>
-              </a:rPr>
-              <a:t>یک سامانه تحلیل، پیش‌بینی و تصمیم‌یار آموزشی است که با تمرکز بر حل مسائل واقعی نظام آموزشی طراحی شده تا کیفیت آموزش را بالا ببرد و به همه نقش‌ها کمک کند تصمیم‌های دقیق‌تری بگیرند.</a:t>
-            </a:r>
-            <a:endParaRPr lang="en-US" sz="1600" dirty="0">
-              <a:latin typeface="Vazirmatn" pitchFamily="2" charset="-78"/>
-              <a:cs typeface="Vazirmatn" pitchFamily="2" charset="-78"/>
-            </a:endParaRPr>
-          </a:p>
-        </p:txBody>
-      </p:sp>
-      <p:sp>
-        <p:nvSpPr>
-          <p:cNvPr id="8" name="Text 3"/>
-          <p:cNvSpPr/>
-          <p:nvPr/>
-        </p:nvSpPr>
-        <p:spPr>
-          <a:xfrm>
-            <a:off x="1097280" y="4023360"/>
-            <a:ext cx="6858000" cy="320040"/>
-          </a:xfrm>
-          <a:prstGeom prst="rect">
-            <a:avLst/>
-          </a:prstGeom>
-          <a:noFill/>
-          <a:ln/>
-        </p:spPr>
-        <p:txBody>
-          <a:bodyPr wrap="square" lIns="0" tIns="0" rIns="0" bIns="0" rtlCol="0" anchor="ctr"/>
-          <a:lstStyle/>
-          <a:p>
-            <a:pPr marL="0" indent="0" algn="r">
-              <a:buNone/>
-            </a:pPr>
-            <a:r>
-              <a:rPr lang="en-US" sz="1400" b="1" dirty="0">
-                <a:solidFill>
-                  <a:srgbClr val="FF4D7A"/>
-                </a:solidFill>
-                <a:latin typeface="Vazirmatn" pitchFamily="2" charset="-78"/>
-                <a:ea typeface="Arial" pitchFamily="34" charset="-122"/>
-                <a:cs typeface="Vazirmatn" pitchFamily="2" charset="-78"/>
-              </a:rPr>
-              <a:t>الگوریتم‌محور  ·  داده‌محور  ·  کاربرمحور</a:t>
-            </a:r>
-            <a:endParaRPr lang="en-US" sz="1400" dirty="0">
-              <a:latin typeface="Vazirmatn" pitchFamily="2" charset="-78"/>
-              <a:cs typeface="Vazirmatn" pitchFamily="2" charset="-78"/>
-            </a:endParaRPr>
-          </a:p>
-        </p:txBody>
-      </p:sp>
-    </p:spTree>
-  </p:cSld>
-  <p:clrMapOvr>
-    <a:masterClrMapping/>
-  </p:clrMapOvr>
-  <mc:AlternateContent xmlns:mc="http://schemas.openxmlformats.org/markup-compatibility/2006">
-    <mc:Choice xmlns:p159="http://schemas.microsoft.com/office/powerpoint/2015/09/main" Requires="p159">
-      <p:transition xmlns:p14="http://schemas.microsoft.com/office/powerpoint/2010/main" spd="slow" p14:dur="2000">
-        <p159:morph option="byChar"/>
-      </p:transition>
-    </mc:Choice>
-    <mc:Fallback>
+    <mc:Fallback xmlns="">
       <p:transition spd="slow">
         <p:fade/>
       </p:transition>
